--- a/examples/example_deck.pptx
+++ b/examples/example_deck.pptx
@@ -26,6 +26,9 @@
     <p:sldId id="274" r:id="rId26"/>
     <p:sldId id="275" r:id="rId27"/>
     <p:sldId id="276" r:id="rId28"/>
+    <p:sldId id="277" r:id="rId29"/>
+    <p:sldId id="278" r:id="rId30"/>
+    <p:sldId id="279" r:id="rId31"/>
   </p:sldIdLst>
   <p:sldSz cx="12191695" cy="6858000" type="screen4x3"/>
   <p:notesSz cx="6858000" cy="9144000"/>
@@ -264,7 +267,9 @@
             <a:lstStyle/>
             <a:p>
               <a:pPr>
-                <a:defRPr sz="1377"/>
+                <a:defRPr sz="1377">
+                  <a:latin typeface="+mn-lt"/>
+                </a:defRPr>
               </a:pPr>
             </a:p>
           </c:txPr>
@@ -306,7 +311,9 @@
           <a:lstStyle/>
           <a:p>
             <a:pPr>
-              <a:defRPr sz="1450"/>
+              <a:defRPr sz="1450">
+                <a:latin typeface="+mn-lt"/>
+              </a:defRPr>
             </a:pPr>
           </a:p>
         </c:txPr>
@@ -341,7 +348,9 @@
               <a:lstStyle/>
               <a:p>
                 <a:r>
-                  <a:rPr sz="1450" b="0"/>
+                  <a:rPr sz="1450" b="0">
+                    <a:latin typeface="+mn-lt"/>
+                  </a:rPr>
                   <a:t>Revenue (k$)</a:t>
                 </a:r>
               </a:p>
@@ -363,7 +372,9 @@
           <a:lstStyle/>
           <a:p>
             <a:pPr>
-              <a:defRPr sz="1450"/>
+              <a:defRPr sz="1450">
+                <a:latin typeface="+mn-lt"/>
+              </a:defRPr>
             </a:pPr>
           </a:p>
         </c:txPr>
@@ -379,7 +390,9 @@
         <a:lstStyle/>
         <a:p>
           <a:pPr>
-            <a:defRPr sz="1450"/>
+            <a:defRPr sz="1450">
+              <a:latin typeface="+mn-lt"/>
+            </a:defRPr>
           </a:pPr>
         </a:p>
       </c:txPr>
@@ -398,6 +411,7 @@
               <a:lumOff val="25000"/>
             </a:schemeClr>
           </a:solidFill>
+          <a:latin typeface="+mn-lt"/>
         </a:defRPr>
       </a:pPr>
       <a:endParaRPr lang="en-US"/>
@@ -640,7 +654,9 @@
           <a:lstStyle/>
           <a:p>
             <a:pPr>
-              <a:defRPr sz="1450"/>
+              <a:defRPr sz="1450">
+                <a:latin typeface="+mn-lt"/>
+              </a:defRPr>
             </a:pPr>
           </a:p>
         </c:txPr>
@@ -675,7 +691,9 @@
               <a:lstStyle/>
               <a:p>
                 <a:r>
-                  <a:rPr sz="1450" b="0"/>
+                  <a:rPr sz="1450" b="0">
+                    <a:latin typeface="+mn-lt"/>
+                  </a:rPr>
                   <a:t>Throughput</a:t>
                 </a:r>
               </a:p>
@@ -697,7 +715,9 @@
           <a:lstStyle/>
           <a:p>
             <a:pPr>
-              <a:defRPr sz="1450"/>
+              <a:defRPr sz="1450">
+                <a:latin typeface="+mn-lt"/>
+              </a:defRPr>
             </a:pPr>
           </a:p>
         </c:txPr>
@@ -714,7 +734,9 @@
         <a:lstStyle/>
         <a:p>
           <a:pPr>
-            <a:defRPr sz="1450"/>
+            <a:defRPr sz="1450">
+              <a:latin typeface="+mn-lt"/>
+            </a:defRPr>
           </a:pPr>
         </a:p>
       </c:txPr>
@@ -735,6 +757,7 @@
               <a:lumOff val="25000"/>
             </a:schemeClr>
           </a:solidFill>
+          <a:latin typeface="+mn-lt"/>
         </a:defRPr>
       </a:pPr>
       <a:endParaRPr lang="en-US"/>
@@ -760,6 +783,7 @@
                 <a:solidFill>
                   <a:schemeClr val="accent1"/>
                 </a:solidFill>
+                <a:latin typeface="+mn-lt"/>
               </a:rPr>
               <a:t>Traffic by channel</a:t>
             </a:r>
@@ -887,7 +911,9 @@
             <a:lstStyle/>
             <a:p>
               <a:pPr>
-                <a:defRPr sz="1377"/>
+                <a:defRPr sz="1377">
+                  <a:latin typeface="+mn-lt"/>
+                </a:defRPr>
               </a:pPr>
             </a:p>
           </c:txPr>
@@ -910,7 +936,9 @@
         <a:lstStyle/>
         <a:p>
           <a:pPr>
-            <a:defRPr sz="1450"/>
+            <a:defRPr sz="1450">
+              <a:latin typeface="+mn-lt"/>
+            </a:defRPr>
           </a:pPr>
         </a:p>
       </c:txPr>
@@ -929,6 +957,7 @@
               <a:lumOff val="25000"/>
             </a:schemeClr>
           </a:solidFill>
+          <a:latin typeface="+mn-lt"/>
         </a:defRPr>
       </a:pPr>
       <a:endParaRPr lang="en-US"/>
@@ -956,6 +985,7 @@
                 <a:solidFill>
                   <a:schemeClr val="accent1"/>
                 </a:solidFill>
+                <a:latin typeface="+mn-lt"/>
               </a:rPr>
               <a:t>Budget</a:t>
             </a:r>
@@ -1100,7 +1130,9 @@
         <a:lstStyle/>
         <a:p>
           <a:pPr>
-            <a:defRPr sz="1450"/>
+            <a:defRPr sz="1450">
+              <a:latin typeface="+mn-lt"/>
+            </a:defRPr>
           </a:pPr>
         </a:p>
       </c:txPr>
@@ -1121,6 +1153,7 @@
               <a:lumOff val="25000"/>
             </a:schemeClr>
           </a:solidFill>
+          <a:latin typeface="+mn-lt"/>
         </a:defRPr>
       </a:pPr>
       <a:endParaRPr/>
@@ -1879,7 +1912,7 @@
                   <a:schemeClr val="bg1"/>
                 </a:solidFill>
               </a:rPr>
-              <a:t>September 27, 2026</a:t>
+              <a:t>October 22, 2026</a:t>
             </a:r>
             <a:endParaRPr lang="en-US" sz="1100"/>
           </a:p>
@@ -2241,7 +2274,7 @@
                   <a:schemeClr val="bg1"/>
                 </a:solidFill>
               </a:rPr>
-              <a:t>September 27, 2026</a:t>
+              <a:t>October 22, 2026</a:t>
             </a:r>
             <a:endParaRPr lang="en-US" sz="1100"/>
           </a:p>
@@ -2667,7 +2700,7 @@
                   <a:schemeClr val="bg1"/>
                 </a:solidFill>
               </a:rPr>
-              <a:t>September 27, 2026</a:t>
+              <a:t>October 22, 2026</a:t>
             </a:r>
             <a:endParaRPr lang="en-US" sz="1100"/>
           </a:p>
@@ -3255,7 +3288,7 @@
             </a:pPr>
             <a:r>
               <a:rPr/>
-              <a:t>September 27, 2026</a:t>
+              <a:t>October 22, 2026</a:t>
             </a:r>
           </a:p>
         </p:txBody>
@@ -3391,8 +3424,8 @@
           <p:nvPr/>
         </p:nvGraphicFramePr>
         <p:xfrm>
-          <a:off x="2742730" y="1729194"/>
-          <a:ext cx="6706235" cy="1787044"/>
+          <a:off x="2742730" y="1725549"/>
+          <a:ext cx="6706235" cy="1791208"/>
         </p:xfrm>
         <a:graphic>
           <a:graphicData uri="http://schemas.openxmlformats.org/drawingml/2006/table">
@@ -3406,7 +3439,7 @@
                 <a:gridCol w="1601470"/>
                 <a:gridCol w="2202180"/>
               </a:tblGrid>
-              <a:tr h="446761">
+              <a:tr h="447802">
                 <a:tc>
                   <a:txBody>
                     <a:bodyPr/>
@@ -3560,7 +3593,7 @@
                   </a:tcPr>
                 </a:tc>
               </a:tr>
-              <a:tr h="446761">
+              <a:tr h="447802">
                 <a:tc>
                   <a:txBody>
                     <a:bodyPr/>
@@ -3690,7 +3723,7 @@
                   </a:tcPr>
                 </a:tc>
               </a:tr>
-              <a:tr h="446761">
+              <a:tr h="447802">
                 <a:tc>
                   <a:txBody>
                     <a:bodyPr/>
@@ -3820,7 +3853,7 @@
                   </a:tcPr>
                 </a:tc>
               </a:tr>
-              <a:tr h="446761">
+              <a:tr h="447802">
                 <a:tc>
                   <a:txBody>
                     <a:bodyPr/>
@@ -3974,7 +4007,7 @@
         </p:nvSpPr>
         <p:spPr>
           <a:xfrm>
-            <a:off x="548640" y="3744836"/>
+            <a:off x="548640" y="3745357"/>
             <a:ext cx="11094415" cy="455168"/>
           </a:xfrm>
           <a:prstGeom prst="rect">
@@ -4206,8 +4239,8 @@
           <p:nvPr/>
         </p:nvGraphicFramePr>
         <p:xfrm>
-          <a:off x="3044883" y="4428604"/>
-          <a:ext cx="6101929" cy="1340283"/>
+          <a:off x="3044883" y="4429125"/>
+          <a:ext cx="6101929" cy="1343406"/>
         </p:xfrm>
         <a:graphic>
           <a:graphicData uri="http://schemas.openxmlformats.org/drawingml/2006/table">
@@ -4221,7 +4254,7 @@
                 <a:gridCol w="1347101"/>
                 <a:gridCol w="1347101"/>
               </a:tblGrid>
-              <a:tr h="446761">
+              <a:tr h="447802">
                 <a:tc>
                   <a:txBody>
                     <a:bodyPr/>
@@ -4359,7 +4392,7 @@
                   </a:tcPr>
                 </a:tc>
               </a:tr>
-              <a:tr h="446761">
+              <a:tr h="447802">
                 <a:tc>
                   <a:txBody>
                     <a:bodyPr/>
@@ -4489,7 +4522,7 @@
                   </a:tcPr>
                 </a:tc>
               </a:tr>
-              <a:tr h="446761">
+              <a:tr h="447802">
                 <a:tc>
                   <a:txBody>
                     <a:bodyPr/>
@@ -4718,8 +4751,8 @@
         </p:nvSpPr>
         <p:spPr>
           <a:xfrm>
-            <a:off x="548640" y="5796093"/>
-            <a:ext cx="11094415" cy="365760"/>
+            <a:off x="548640" y="5786949"/>
+            <a:ext cx="11094415" cy="329184"/>
           </a:xfrm>
           <a:prstGeom prst="rect">
             <a:avLst/>
@@ -4882,6 +4915,1084 @@
 </file>
 
 <file path=ppt/slides/slide13.xml><?xml version="1.0" encoding="utf-8"?>
+<p:sld xmlns:a="http://schemas.openxmlformats.org/drawingml/2006/main" xmlns:p="http://schemas.openxmlformats.org/presentationml/2006/main" xmlns:r="http://schemas.openxmlformats.org/officeDocument/2006/relationships">
+  <p:cSld>
+    <p:spTree>
+      <p:nvGrpSpPr>
+        <p:cNvPr id="1" name=""/>
+        <p:cNvGrpSpPr/>
+        <p:nvPr/>
+      </p:nvGrpSpPr>
+      <p:grpSpPr/>
+      <p:sp>
+        <p:nvSpPr>
+          <p:cNvPr id="2" name="Title 1"/>
+          <p:cNvSpPr>
+            <a:spLocks noGrp="1"/>
+          </p:cNvSpPr>
+          <p:nvPr>
+            <p:ph type="title"/>
+          </p:nvPr>
+        </p:nvSpPr>
+        <p:spPr/>
+        <p:txBody>
+          <a:bodyPr/>
+          <a:lstStyle/>
+          <a:p>
+            <a:r>
+              <a:rPr/>
+              <a:t>SVG figures and figure rows</a:t>
+            </a:r>
+          </a:p>
+        </p:txBody>
+      </p:sp>
+      <p:pic>
+        <p:nvPicPr>
+          <p:cNvPr id="3" name="contour.png" descr="image.png"/>
+          <p:cNvPicPr>
+            <a:picLocks noChangeAspect="1"/>
+          </p:cNvPicPr>
+          <p:nvPr/>
+        </p:nvPicPr>
+        <p:blipFill>
+          <a:blip r:embed="rId2"/>
+          <a:stretch>
+            <a:fillRect/>
+          </a:stretch>
+        </p:blipFill>
+        <p:spPr>
+          <a:xfrm>
+            <a:off x="548640" y="1427433"/>
+            <a:ext cx="6954122" cy="3911693"/>
+          </a:xfrm>
+          <a:prstGeom prst="rect">
+            <a:avLst/>
+          </a:prstGeom>
+        </p:spPr>
+      </p:pic>
+      <p:sp>
+        <p:nvSpPr>
+          <p:cNvPr id="4" name="Caption"/>
+          <p:cNvSpPr txBox="1"/>
+          <p:nvPr/>
+        </p:nvSpPr>
+        <p:spPr>
+          <a:xfrm>
+            <a:off x="434340" y="5375703"/>
+            <a:ext cx="7182722" cy="329184"/>
+          </a:xfrm>
+          <a:prstGeom prst="rect">
+            <a:avLst/>
+          </a:prstGeom>
+          <a:noFill/>
+        </p:spPr>
+        <p:txBody>
+          <a:bodyPr wrap="square" anchor="t" lIns="18288" rIns="18288" tIns="36576" bIns="36576">
+            <a:spAutoFit/>
+          </a:bodyPr>
+          <a:lstStyle/>
+          <a:p>
+            <a:pPr marL="0" indent="0" algn="ctr">
+              <a:buNone/>
+            </a:pPr>
+            <a:r>
+              <a:rPr sz="1450">
+                <a:solidFill>
+                  <a:schemeClr val="tx1">
+                    <a:lumMod val="55000"/>
+                    <a:lumOff val="45000"/>
+                  </a:schemeClr>
+                </a:solidFill>
+              </a:rPr>
+              <a:t>(a) PNG from any tool</a:t>
+            </a:r>
+          </a:p>
+        </p:txBody>
+      </p:sp>
+      <p:pic>
+        <p:nvPicPr>
+          <p:cNvPr id="5" name="attention.svg" descr="image.png"/>
+          <p:cNvPicPr>
+            <a:picLocks noChangeAspect="1"/>
+          </p:cNvPicPr>
+          <p:nvPr/>
+        </p:nvPicPr>
+        <p:blipFill>
+          <a:blip r:embed="rId3">
+            <a:extLst>
+              <a:ext uri="{96DAC541-7B7A-43D3-8B79-37D633B846F1}">
+                <asvg:svgBlip xmlns:asvg="http://schemas.microsoft.com/office/drawing/2016/SVG/main" r:embed="rId4"/>
+              </a:ext>
+            </a:extLst>
+          </a:blip>
+          <a:stretch>
+            <a:fillRect/>
+          </a:stretch>
+        </p:blipFill>
+        <p:spPr>
+          <a:xfrm>
+            <a:off x="7731362" y="1427433"/>
+            <a:ext cx="3911693" cy="3911693"/>
+          </a:xfrm>
+          <a:prstGeom prst="rect">
+            <a:avLst/>
+          </a:prstGeom>
+        </p:spPr>
+      </p:pic>
+      <p:sp>
+        <p:nvSpPr>
+          <p:cNvPr id="6" name="Caption"/>
+          <p:cNvSpPr txBox="1"/>
+          <p:nvPr/>
+        </p:nvSpPr>
+        <p:spPr>
+          <a:xfrm>
+            <a:off x="7617062" y="5375703"/>
+            <a:ext cx="4140293" cy="329184"/>
+          </a:xfrm>
+          <a:prstGeom prst="rect">
+            <a:avLst/>
+          </a:prstGeom>
+          <a:noFill/>
+        </p:spPr>
+        <p:txBody>
+          <a:bodyPr wrap="square" anchor="t" lIns="18288" rIns="18288" tIns="36576" bIns="36576">
+            <a:spAutoFit/>
+          </a:bodyPr>
+          <a:lstStyle/>
+          <a:p>
+            <a:pPr marL="0" indent="0" algn="ctr">
+              <a:buNone/>
+            </a:pPr>
+            <a:r>
+              <a:rPr sz="1450">
+                <a:solidFill>
+                  <a:schemeClr val="tx1">
+                    <a:lumMod val="55000"/>
+                    <a:lumOff val="45000"/>
+                  </a:schemeClr>
+                </a:solidFill>
+              </a:rPr>
+              <a:t>(b) SVG: stays sharp at any size</a:t>
+            </a:r>
+          </a:p>
+        </p:txBody>
+      </p:sp>
+      <p:sp>
+        <p:nvSpPr>
+          <p:cNvPr id="7" name="Caption"/>
+          <p:cNvSpPr txBox="1"/>
+          <p:nvPr/>
+        </p:nvSpPr>
+        <p:spPr>
+          <a:xfrm>
+            <a:off x="548640" y="5741463"/>
+            <a:ext cx="11094415" cy="329184"/>
+          </a:xfrm>
+          <a:prstGeom prst="rect">
+            <a:avLst/>
+          </a:prstGeom>
+          <a:noFill/>
+        </p:spPr>
+        <p:txBody>
+          <a:bodyPr wrap="square" anchor="t" lIns="18288" rIns="18288" tIns="36576" bIns="36576">
+            <a:spAutoFit/>
+          </a:bodyPr>
+          <a:lstStyle/>
+          <a:p>
+            <a:pPr marL="0" indent="0" algn="ctr">
+              <a:buNone/>
+            </a:pPr>
+            <a:r>
+              <a:rPr sz="1450" i="1">
+                <a:solidFill>
+                  <a:schemeClr val="tx1">
+                    <a:lumMod val="55000"/>
+                    <a:lumOff val="45000"/>
+                  </a:schemeClr>
+                </a:solidFill>
+              </a:rPr>
+              <a:t>Figures in a row share one height and keep their aspect ratio.</a:t>
+            </a:r>
+          </a:p>
+        </p:txBody>
+      </p:sp>
+    </p:spTree>
+  </p:cSld>
+  <p:clrMapOvr>
+    <a:masterClrMapping/>
+  </p:clrMapOvr>
+  <p:transition spd="med">
+    <p:fade/>
+  </p:transition>
+  <p:timing>
+    <p:tnLst>
+      <p:par>
+        <p:cTn id="1" dur="indefinite" restart="never" nodeType="tmRoot">
+          <p:childTnLst>
+            <p:seq concurrent="1" nextAc="seek">
+              <p:cTn id="2" dur="indefinite" nodeType="mainSeq">
+                <p:childTnLst>
+                  <p:par>
+                    <p:cTn id="3" fill="hold">
+                      <p:stCondLst>
+                        <p:cond delay="indefinite"/>
+                      </p:stCondLst>
+                      <p:childTnLst>
+                        <p:par>
+                          <p:cTn id="4" fill="hold">
+                            <p:stCondLst>
+                              <p:cond delay="0"/>
+                            </p:stCondLst>
+                            <p:childTnLst>
+                              <p:par>
+                                <p:cTn id="5" presetID="10" presetClass="entr" presetSubtype="0" fill="hold" grpId="0" nodeType="clickEffect">
+                                  <p:stCondLst>
+                                    <p:cond delay="0"/>
+                                  </p:stCondLst>
+                                  <p:childTnLst>
+                                    <p:set>
+                                      <p:cBhvr>
+                                        <p:cTn id="6" dur="1" fill="hold">
+                                          <p:stCondLst>
+                                            <p:cond delay="0"/>
+                                          </p:stCondLst>
+                                        </p:cTn>
+                                        <p:tgtEl>
+                                          <p:spTgt spid="3"/>
+                                        </p:tgtEl>
+                                        <p:attrNameLst>
+                                          <p:attrName>style.visibility</p:attrName>
+                                        </p:attrNameLst>
+                                      </p:cBhvr>
+                                      <p:to>
+                                        <p:strVal val="visible"/>
+                                      </p:to>
+                                    </p:set>
+                                    <p:animEffect transition="in" filter="fade">
+                                      <p:cBhvr>
+                                        <p:cTn id="7" dur="500"/>
+                                        <p:tgtEl>
+                                          <p:spTgt spid="3"/>
+                                        </p:tgtEl>
+                                      </p:cBhvr>
+                                    </p:animEffect>
+                                  </p:childTnLst>
+                                </p:cTn>
+                              </p:par>
+                              <p:par>
+                                <p:cTn id="8" presetID="10" presetClass="entr" presetSubtype="0" fill="hold" grpId="0" nodeType="withEffect">
+                                  <p:stCondLst>
+                                    <p:cond delay="0"/>
+                                  </p:stCondLst>
+                                  <p:childTnLst>
+                                    <p:set>
+                                      <p:cBhvr>
+                                        <p:cTn id="9" dur="1" fill="hold">
+                                          <p:stCondLst>
+                                            <p:cond delay="0"/>
+                                          </p:stCondLst>
+                                        </p:cTn>
+                                        <p:tgtEl>
+                                          <p:spTgt spid="4"/>
+                                        </p:tgtEl>
+                                        <p:attrNameLst>
+                                          <p:attrName>style.visibility</p:attrName>
+                                        </p:attrNameLst>
+                                      </p:cBhvr>
+                                      <p:to>
+                                        <p:strVal val="visible"/>
+                                      </p:to>
+                                    </p:set>
+                                    <p:animEffect transition="in" filter="fade">
+                                      <p:cBhvr>
+                                        <p:cTn id="10" dur="500"/>
+                                        <p:tgtEl>
+                                          <p:spTgt spid="4"/>
+                                        </p:tgtEl>
+                                      </p:cBhvr>
+                                    </p:animEffect>
+                                  </p:childTnLst>
+                                </p:cTn>
+                              </p:par>
+                            </p:childTnLst>
+                          </p:cTn>
+                        </p:par>
+                      </p:childTnLst>
+                    </p:cTn>
+                  </p:par>
+                  <p:par>
+                    <p:cTn id="11" fill="hold">
+                      <p:stCondLst>
+                        <p:cond delay="indefinite"/>
+                      </p:stCondLst>
+                      <p:childTnLst>
+                        <p:par>
+                          <p:cTn id="12" fill="hold">
+                            <p:stCondLst>
+                              <p:cond delay="0"/>
+                            </p:stCondLst>
+                            <p:childTnLst>
+                              <p:par>
+                                <p:cTn id="13" presetID="10" presetClass="entr" presetSubtype="0" fill="hold" grpId="0" nodeType="clickEffect">
+                                  <p:stCondLst>
+                                    <p:cond delay="0"/>
+                                  </p:stCondLst>
+                                  <p:childTnLst>
+                                    <p:set>
+                                      <p:cBhvr>
+                                        <p:cTn id="14" dur="1" fill="hold">
+                                          <p:stCondLst>
+                                            <p:cond delay="0"/>
+                                          </p:stCondLst>
+                                        </p:cTn>
+                                        <p:tgtEl>
+                                          <p:spTgt spid="5"/>
+                                        </p:tgtEl>
+                                        <p:attrNameLst>
+                                          <p:attrName>style.visibility</p:attrName>
+                                        </p:attrNameLst>
+                                      </p:cBhvr>
+                                      <p:to>
+                                        <p:strVal val="visible"/>
+                                      </p:to>
+                                    </p:set>
+                                    <p:animEffect transition="in" filter="fade">
+                                      <p:cBhvr>
+                                        <p:cTn id="15" dur="500"/>
+                                        <p:tgtEl>
+                                          <p:spTgt spid="5"/>
+                                        </p:tgtEl>
+                                      </p:cBhvr>
+                                    </p:animEffect>
+                                  </p:childTnLst>
+                                </p:cTn>
+                              </p:par>
+                              <p:par>
+                                <p:cTn id="16" presetID="10" presetClass="entr" presetSubtype="0" fill="hold" grpId="0" nodeType="withEffect">
+                                  <p:stCondLst>
+                                    <p:cond delay="0"/>
+                                  </p:stCondLst>
+                                  <p:childTnLst>
+                                    <p:set>
+                                      <p:cBhvr>
+                                        <p:cTn id="17" dur="1" fill="hold">
+                                          <p:stCondLst>
+                                            <p:cond delay="0"/>
+                                          </p:stCondLst>
+                                        </p:cTn>
+                                        <p:tgtEl>
+                                          <p:spTgt spid="6"/>
+                                        </p:tgtEl>
+                                        <p:attrNameLst>
+                                          <p:attrName>style.visibility</p:attrName>
+                                        </p:attrNameLst>
+                                      </p:cBhvr>
+                                      <p:to>
+                                        <p:strVal val="visible"/>
+                                      </p:to>
+                                    </p:set>
+                                    <p:animEffect transition="in" filter="fade">
+                                      <p:cBhvr>
+                                        <p:cTn id="18" dur="500"/>
+                                        <p:tgtEl>
+                                          <p:spTgt spid="6"/>
+                                        </p:tgtEl>
+                                      </p:cBhvr>
+                                    </p:animEffect>
+                                  </p:childTnLst>
+                                </p:cTn>
+                              </p:par>
+                            </p:childTnLst>
+                          </p:cTn>
+                        </p:par>
+                      </p:childTnLst>
+                    </p:cTn>
+                  </p:par>
+                </p:childTnLst>
+              </p:cTn>
+              <p:prevCondLst>
+                <p:cond evt="onPrev" delay="0">
+                  <p:tgtEl>
+                    <p:sldTgt/>
+                  </p:tgtEl>
+                </p:cond>
+              </p:prevCondLst>
+              <p:nextCondLst>
+                <p:cond evt="onNext" delay="0">
+                  <p:tgtEl>
+                    <p:sldTgt/>
+                  </p:tgtEl>
+                </p:cond>
+              </p:nextCondLst>
+            </p:seq>
+          </p:childTnLst>
+        </p:cTn>
+      </p:par>
+    </p:tnLst>
+    <p:bldLst>
+      <p:bldP spid="4" grpId="0" animBg="1"/>
+      <p:bldP spid="6" grpId="0" animBg="1"/>
+    </p:bldLst>
+  </p:timing>
+</p:sld>
+</file>
+
+<file path=ppt/slides/slide14.xml><?xml version="1.0" encoding="utf-8"?>
+<p:sld xmlns:a="http://schemas.openxmlformats.org/drawingml/2006/main" xmlns:p="http://schemas.openxmlformats.org/presentationml/2006/main" xmlns:r="http://schemas.openxmlformats.org/officeDocument/2006/relationships">
+  <p:cSld>
+    <p:spTree>
+      <p:nvGrpSpPr>
+        <p:cNvPr id="1" name=""/>
+        <p:cNvGrpSpPr/>
+        <p:nvPr/>
+      </p:nvGrpSpPr>
+      <p:grpSpPr/>
+      <p:sp>
+        <p:nvSpPr>
+          <p:cNvPr id="2" name="Title 1"/>
+          <p:cNvSpPr>
+            <a:spLocks noGrp="1"/>
+          </p:cNvSpPr>
+          <p:nvPr>
+            <p:ph type="title"/>
+          </p:nvPr>
+        </p:nvSpPr>
+        <p:spPr/>
+        <p:txBody>
+          <a:bodyPr/>
+          <a:lstStyle/>
+          <a:p>
+            <a:r>
+              <a:rPr/>
+              <a:t>Key numbers</a:t>
+            </a:r>
+          </a:p>
+        </p:txBody>
+      </p:sp>
+      <p:sp>
+        <p:nvSpPr>
+          <p:cNvPr id="3" name="Stat: +4.2"/>
+          <p:cNvSpPr txBox="1"/>
+          <p:nvPr/>
+        </p:nvSpPr>
+        <p:spPr>
+          <a:xfrm>
+            <a:off x="548640" y="2709164"/>
+            <a:ext cx="3515258" cy="1304544"/>
+          </a:xfrm>
+          <a:prstGeom prst="rect">
+            <a:avLst/>
+          </a:prstGeom>
+          <a:noFill/>
+        </p:spPr>
+        <p:txBody>
+          <a:bodyPr wrap="square" anchor="t" lIns="18288" rIns="18288" tIns="36576" bIns="36576">
+            <a:spAutoFit/>
+          </a:bodyPr>
+          <a:lstStyle/>
+          <a:p>
+            <a:pPr marL="0" indent="0" algn="ctr">
+              <a:buNone/>
+            </a:pPr>
+            <a:r>
+              <a:rPr sz="3960" b="1">
+                <a:solidFill>
+                  <a:schemeClr val="accent1"/>
+                </a:solidFill>
+              </a:rPr>
+              <a:t>+4.2</a:t>
+            </a:r>
+          </a:p>
+          <a:p>
+            <a:pPr marL="0" indent="0" algn="ctr">
+              <a:buNone/>
+            </a:pPr>
+            <a:r>
+              <a:rPr sz="1760">
+                <a:solidFill>
+                  <a:schemeClr val="tx1">
+                    <a:lumMod val="55000"/>
+                    <a:lumOff val="45000"/>
+                  </a:schemeClr>
+                </a:solidFill>
+              </a:rPr>
+              <a:t>accuracy points over the baseline</a:t>
+            </a:r>
+          </a:p>
+        </p:txBody>
+      </p:sp>
+      <p:sp>
+        <p:nvSpPr>
+          <p:cNvPr id="4" name="Stat: 3×"/>
+          <p:cNvSpPr txBox="1"/>
+          <p:nvPr/>
+        </p:nvSpPr>
+        <p:spPr>
+          <a:xfrm>
+            <a:off x="4338218" y="2709164"/>
+            <a:ext cx="3515258" cy="1304544"/>
+          </a:xfrm>
+          <a:prstGeom prst="rect">
+            <a:avLst/>
+          </a:prstGeom>
+          <a:noFill/>
+        </p:spPr>
+        <p:txBody>
+          <a:bodyPr wrap="square" anchor="t" lIns="18288" rIns="18288" tIns="36576" bIns="36576">
+            <a:spAutoFit/>
+          </a:bodyPr>
+          <a:lstStyle/>
+          <a:p>
+            <a:pPr marL="0" indent="0" algn="ctr">
+              <a:buNone/>
+            </a:pPr>
+            <a:r>
+              <a:rPr sz="3960" b="1">
+                <a:solidFill>
+                  <a:schemeClr val="accent1"/>
+                </a:solidFill>
+              </a:rPr>
+              <a:t>3×</a:t>
+            </a:r>
+          </a:p>
+          <a:p>
+            <a:pPr marL="0" indent="0" algn="ctr">
+              <a:buNone/>
+            </a:pPr>
+            <a:r>
+              <a:rPr sz="1760">
+                <a:solidFill>
+                  <a:schemeClr val="tx1">
+                    <a:lumMod val="55000"/>
+                    <a:lumOff val="45000"/>
+                  </a:schemeClr>
+                </a:solidFill>
+              </a:rPr>
+              <a:t>faster to rebuild than to edit by hand</a:t>
+            </a:r>
+          </a:p>
+        </p:txBody>
+      </p:sp>
+      <p:sp>
+        <p:nvSpPr>
+          <p:cNvPr id="5" name="Stat: 0"/>
+          <p:cNvSpPr txBox="1"/>
+          <p:nvPr/>
+        </p:nvSpPr>
+        <p:spPr>
+          <a:xfrm>
+            <a:off x="8127797" y="2709164"/>
+            <a:ext cx="3515258" cy="1304544"/>
+          </a:xfrm>
+          <a:prstGeom prst="rect">
+            <a:avLst/>
+          </a:prstGeom>
+          <a:noFill/>
+        </p:spPr>
+        <p:txBody>
+          <a:bodyPr wrap="square" anchor="t" lIns="18288" rIns="18288" tIns="36576" bIns="36576">
+            <a:spAutoFit/>
+          </a:bodyPr>
+          <a:lstStyle/>
+          <a:p>
+            <a:pPr marL="0" indent="0" algn="ctr">
+              <a:buNone/>
+            </a:pPr>
+            <a:r>
+              <a:rPr sz="3960" b="1">
+                <a:solidFill>
+                  <a:schemeClr val="accent2"/>
+                </a:solidFill>
+              </a:rPr>
+              <a:t>0</a:t>
+            </a:r>
+          </a:p>
+          <a:p>
+            <a:pPr marL="0" indent="0" algn="ctr">
+              <a:buNone/>
+            </a:pPr>
+            <a:r>
+              <a:rPr sz="1760">
+                <a:solidFill>
+                  <a:schemeClr val="tx1">
+                    <a:lumMod val="55000"/>
+                    <a:lumOff val="45000"/>
+                  </a:schemeClr>
+                </a:solidFill>
+              </a:rPr>
+              <a:t>formatting steps by hand</a:t>
+            </a:r>
+          </a:p>
+        </p:txBody>
+      </p:sp>
+      <p:sp>
+        <p:nvSpPr>
+          <p:cNvPr id="6" name="TextBox 5"/>
+          <p:cNvSpPr txBox="1"/>
+          <p:nvPr/>
+        </p:nvSpPr>
+        <p:spPr>
+          <a:xfrm>
+            <a:off x="548640" y="4242308"/>
+            <a:ext cx="11094415" cy="546608"/>
+          </a:xfrm>
+          <a:prstGeom prst="rect">
+            <a:avLst/>
+          </a:prstGeom>
+          <a:noFill/>
+        </p:spPr>
+        <p:txBody>
+          <a:bodyPr wrap="square" anchor="t" lIns="18288" rIns="18288" tIns="36576" bIns="36576">
+            <a:spAutoFit/>
+          </a:bodyPr>
+          <a:lstStyle>
+            <a:lvl1pPr marL="310896" indent="-310896" algn="l" defTabSz="914400" rtl="0" eaLnBrk="1" latinLnBrk="0" hangingPunct="1">
+              <a:lnSpc>
+                <a:spcPct val="100000"/>
+              </a:lnSpc>
+              <a:spcBef>
+                <a:spcPts val="1000"/>
+              </a:spcBef>
+              <a:buClr>
+                <a:schemeClr val="accent1"/>
+              </a:buClr>
+              <a:buSzPct val="70000"/>
+              <a:buFont typeface="Arial" panose="020B0604020202020204"/>
+              <a:buChar char="►"/>
+              <a:defRPr sz="2200" kern="1200">
+                <a:solidFill>
+                  <a:schemeClr val="tx1"/>
+                </a:solidFill>
+                <a:latin typeface="+mn-lt"/>
+                <a:ea typeface="+mn-ea"/>
+                <a:cs typeface="+mn-cs"/>
+              </a:defRPr>
+            </a:lvl1pPr>
+            <a:lvl2pPr marL="676656" indent="-274320" algn="l" defTabSz="914400" rtl="0" eaLnBrk="1" latinLnBrk="0" hangingPunct="1">
+              <a:lnSpc>
+                <a:spcPct val="100000"/>
+              </a:lnSpc>
+              <a:spcBef>
+                <a:spcPts val="400"/>
+              </a:spcBef>
+              <a:buClr>
+                <a:schemeClr val="accent1"/>
+              </a:buClr>
+              <a:buSzPct val="100000"/>
+              <a:buFont typeface="Arial" panose="020B0604020202020204"/>
+              <a:buChar char="•"/>
+              <a:defRPr sz="2000" kern="1200">
+                <a:solidFill>
+                  <a:schemeClr val="tx1"/>
+                </a:solidFill>
+                <a:latin typeface="+mn-lt"/>
+                <a:ea typeface="+mn-ea"/>
+                <a:cs typeface="+mn-cs"/>
+              </a:defRPr>
+            </a:lvl2pPr>
+            <a:lvl3pPr marL="1005840" indent="-256032" algn="l" defTabSz="914400" rtl="0" eaLnBrk="1" latinLnBrk="0" hangingPunct="1">
+              <a:lnSpc>
+                <a:spcPct val="100000"/>
+              </a:lnSpc>
+              <a:spcBef>
+                <a:spcPts val="300"/>
+              </a:spcBef>
+              <a:buClr>
+                <a:schemeClr val="accent1"/>
+              </a:buClr>
+              <a:buSzPct val="100000"/>
+              <a:buFont typeface="Arial" panose="020B0604020202020204"/>
+              <a:buChar char="–"/>
+              <a:defRPr sz="1800" kern="1200">
+                <a:solidFill>
+                  <a:schemeClr val="tx1"/>
+                </a:solidFill>
+                <a:latin typeface="+mn-lt"/>
+                <a:ea typeface="+mn-ea"/>
+                <a:cs typeface="+mn-cs"/>
+              </a:defRPr>
+            </a:lvl3pPr>
+            <a:lvl4pPr marL="1325880" indent="-237744" algn="l" defTabSz="914400" rtl="0" eaLnBrk="1" latinLnBrk="0" hangingPunct="1">
+              <a:lnSpc>
+                <a:spcPct val="100000"/>
+              </a:lnSpc>
+              <a:spcBef>
+                <a:spcPts val="200"/>
+              </a:spcBef>
+              <a:buClr>
+                <a:schemeClr val="accent1"/>
+              </a:buClr>
+              <a:buSzPct val="100000"/>
+              <a:buFont typeface="Arial" panose="020B0604020202020204"/>
+              <a:buChar char="•"/>
+              <a:defRPr sz="1600" kern="1200">
+                <a:solidFill>
+                  <a:schemeClr val="tx1"/>
+                </a:solidFill>
+                <a:latin typeface="+mn-lt"/>
+                <a:ea typeface="+mn-ea"/>
+                <a:cs typeface="+mn-cs"/>
+              </a:defRPr>
+            </a:lvl4pPr>
+            <a:lvl5pPr marL="1645920" indent="-237744" algn="l" defTabSz="914400" rtl="0" eaLnBrk="1" latinLnBrk="0" hangingPunct="1">
+              <a:lnSpc>
+                <a:spcPct val="100000"/>
+              </a:lnSpc>
+              <a:spcBef>
+                <a:spcPts val="200"/>
+              </a:spcBef>
+              <a:buClr>
+                <a:schemeClr val="accent1"/>
+              </a:buClr>
+              <a:buSzPct val="100000"/>
+              <a:buFont typeface="Arial" panose="020B0604020202020204"/>
+              <a:buChar char="–"/>
+              <a:defRPr sz="1600" kern="1200">
+                <a:solidFill>
+                  <a:schemeClr val="tx1"/>
+                </a:solidFill>
+                <a:latin typeface="+mn-lt"/>
+                <a:ea typeface="+mn-ea"/>
+                <a:cs typeface="+mn-cs"/>
+              </a:defRPr>
+            </a:lvl5pPr>
+            <a:lvl6pPr marL="1965960" indent="-237744" algn="l" defTabSz="914400" rtl="0" eaLnBrk="1" latinLnBrk="0" hangingPunct="1">
+              <a:lnSpc>
+                <a:spcPct val="100000"/>
+              </a:lnSpc>
+              <a:spcBef>
+                <a:spcPts val="200"/>
+              </a:spcBef>
+              <a:buClr>
+                <a:schemeClr val="accent1"/>
+              </a:buClr>
+              <a:buSzPct val="100000"/>
+              <a:buFont typeface="Arial" panose="020B0604020202020204"/>
+              <a:buChar char="•"/>
+              <a:defRPr sz="1600" kern="1200">
+                <a:solidFill>
+                  <a:schemeClr val="tx1"/>
+                </a:solidFill>
+                <a:latin typeface="+mn-lt"/>
+                <a:ea typeface="+mn-ea"/>
+                <a:cs typeface="+mn-cs"/>
+              </a:defRPr>
+            </a:lvl6pPr>
+            <a:lvl7pPr marL="2286000" indent="-237744" algn="l" defTabSz="914400" rtl="0" eaLnBrk="1" latinLnBrk="0" hangingPunct="1">
+              <a:lnSpc>
+                <a:spcPct val="100000"/>
+              </a:lnSpc>
+              <a:spcBef>
+                <a:spcPts val="200"/>
+              </a:spcBef>
+              <a:buClr>
+                <a:schemeClr val="accent1"/>
+              </a:buClr>
+              <a:buSzPct val="100000"/>
+              <a:buFont typeface="Arial" panose="020B0604020202020204"/>
+              <a:buChar char="•"/>
+              <a:defRPr sz="1600" kern="1200">
+                <a:solidFill>
+                  <a:schemeClr val="tx1"/>
+                </a:solidFill>
+                <a:latin typeface="+mn-lt"/>
+                <a:ea typeface="+mn-ea"/>
+                <a:cs typeface="+mn-cs"/>
+              </a:defRPr>
+            </a:lvl7pPr>
+            <a:lvl8pPr marL="2606040" indent="-237744" algn="l" defTabSz="914400" rtl="0" eaLnBrk="1" latinLnBrk="0" hangingPunct="1">
+              <a:lnSpc>
+                <a:spcPct val="100000"/>
+              </a:lnSpc>
+              <a:spcBef>
+                <a:spcPts val="200"/>
+              </a:spcBef>
+              <a:buClr>
+                <a:schemeClr val="accent1"/>
+              </a:buClr>
+              <a:buSzPct val="100000"/>
+              <a:buFont typeface="Arial" panose="020B0604020202020204"/>
+              <a:buChar char="•"/>
+              <a:defRPr sz="1600" kern="1200">
+                <a:solidFill>
+                  <a:schemeClr val="tx1"/>
+                </a:solidFill>
+                <a:latin typeface="+mn-lt"/>
+                <a:ea typeface="+mn-ea"/>
+                <a:cs typeface="+mn-cs"/>
+              </a:defRPr>
+            </a:lvl8pPr>
+            <a:lvl9pPr marL="2926080" indent="-237744" algn="l" defTabSz="914400" rtl="0" eaLnBrk="1" latinLnBrk="0" hangingPunct="1">
+              <a:lnSpc>
+                <a:spcPct val="100000"/>
+              </a:lnSpc>
+              <a:spcBef>
+                <a:spcPts val="200"/>
+              </a:spcBef>
+              <a:buClr>
+                <a:schemeClr val="accent1"/>
+              </a:buClr>
+              <a:buSzPct val="100000"/>
+              <a:buFont typeface="Arial" panose="020B0604020202020204"/>
+              <a:buChar char="•"/>
+              <a:defRPr sz="1600" kern="1200">
+                <a:solidFill>
+                  <a:schemeClr val="tx1"/>
+                </a:solidFill>
+                <a:latin typeface="+mn-lt"/>
+                <a:ea typeface="+mn-ea"/>
+                <a:cs typeface="+mn-cs"/>
+              </a:defRPr>
+            </a:lvl9pPr>
+          </a:lstStyle>
+          <a:p>
+            <a:pPr marL="0" indent="0" algn="ctr">
+              <a:buNone/>
+            </a:pPr>
+            <a:r>
+              <a:rPr sz="2200">
+                <a:solidFill>
+                  <a:schemeClr val="tx1">
+                    <a:lumMod val="55000"/>
+                    <a:lumOff val="45000"/>
+                  </a:schemeClr>
+                </a:solidFill>
+              </a:rPr>
+              <a:t>One number per click, like the bullets of a Beamer </a:t>
+            </a:r>
+            <a:r>
+              <a:rPr sz="2200">
+                <a:solidFill>
+                  <a:schemeClr val="tx1">
+                    <a:lumMod val="55000"/>
+                    <a:lumOff val="45000"/>
+                  </a:schemeClr>
+                </a:solidFill>
+                <a:latin typeface="Courier New"/>
+              </a:rPr>
+              <a:t>\pause</a:t>
+            </a:r>
+            <a:r>
+              <a:rPr sz="2200">
+                <a:solidFill>
+                  <a:schemeClr val="tx1">
+                    <a:lumMod val="55000"/>
+                    <a:lumOff val="45000"/>
+                  </a:schemeClr>
+                </a:solidFill>
+              </a:rPr>
+              <a:t>.</a:t>
+            </a:r>
+          </a:p>
+        </p:txBody>
+      </p:sp>
+    </p:spTree>
+  </p:cSld>
+  <p:clrMapOvr>
+    <a:masterClrMapping/>
+  </p:clrMapOvr>
+  <p:transition spd="med">
+    <p:fade/>
+  </p:transition>
+  <p:timing>
+    <p:tnLst>
+      <p:par>
+        <p:cTn id="1" dur="indefinite" restart="never" nodeType="tmRoot">
+          <p:childTnLst>
+            <p:seq concurrent="1" nextAc="seek">
+              <p:cTn id="2" dur="indefinite" nodeType="mainSeq">
+                <p:childTnLst>
+                  <p:par>
+                    <p:cTn id="3" fill="hold">
+                      <p:stCondLst>
+                        <p:cond delay="indefinite"/>
+                      </p:stCondLst>
+                      <p:childTnLst>
+                        <p:par>
+                          <p:cTn id="4" fill="hold">
+                            <p:stCondLst>
+                              <p:cond delay="0"/>
+                            </p:stCondLst>
+                            <p:childTnLst>
+                              <p:par>
+                                <p:cTn id="5" presetID="10" presetClass="entr" presetSubtype="0" fill="hold" grpId="0" nodeType="clickEffect">
+                                  <p:stCondLst>
+                                    <p:cond delay="0"/>
+                                  </p:stCondLst>
+                                  <p:childTnLst>
+                                    <p:set>
+                                      <p:cBhvr>
+                                        <p:cTn id="6" dur="1" fill="hold">
+                                          <p:stCondLst>
+                                            <p:cond delay="0"/>
+                                          </p:stCondLst>
+                                        </p:cTn>
+                                        <p:tgtEl>
+                                          <p:spTgt spid="3"/>
+                                        </p:tgtEl>
+                                        <p:attrNameLst>
+                                          <p:attrName>style.visibility</p:attrName>
+                                        </p:attrNameLst>
+                                      </p:cBhvr>
+                                      <p:to>
+                                        <p:strVal val="visible"/>
+                                      </p:to>
+                                    </p:set>
+                                    <p:animEffect transition="in" filter="fade">
+                                      <p:cBhvr>
+                                        <p:cTn id="7" dur="500"/>
+                                        <p:tgtEl>
+                                          <p:spTgt spid="3"/>
+                                        </p:tgtEl>
+                                      </p:cBhvr>
+                                    </p:animEffect>
+                                  </p:childTnLst>
+                                </p:cTn>
+                              </p:par>
+                            </p:childTnLst>
+                          </p:cTn>
+                        </p:par>
+                      </p:childTnLst>
+                    </p:cTn>
+                  </p:par>
+                  <p:par>
+                    <p:cTn id="8" fill="hold">
+                      <p:stCondLst>
+                        <p:cond delay="indefinite"/>
+                      </p:stCondLst>
+                      <p:childTnLst>
+                        <p:par>
+                          <p:cTn id="9" fill="hold">
+                            <p:stCondLst>
+                              <p:cond delay="0"/>
+                            </p:stCondLst>
+                            <p:childTnLst>
+                              <p:par>
+                                <p:cTn id="10" presetID="10" presetClass="entr" presetSubtype="0" fill="hold" grpId="0" nodeType="clickEffect">
+                                  <p:stCondLst>
+                                    <p:cond delay="0"/>
+                                  </p:stCondLst>
+                                  <p:childTnLst>
+                                    <p:set>
+                                      <p:cBhvr>
+                                        <p:cTn id="11" dur="1" fill="hold">
+                                          <p:stCondLst>
+                                            <p:cond delay="0"/>
+                                          </p:stCondLst>
+                                        </p:cTn>
+                                        <p:tgtEl>
+                                          <p:spTgt spid="4"/>
+                                        </p:tgtEl>
+                                        <p:attrNameLst>
+                                          <p:attrName>style.visibility</p:attrName>
+                                        </p:attrNameLst>
+                                      </p:cBhvr>
+                                      <p:to>
+                                        <p:strVal val="visible"/>
+                                      </p:to>
+                                    </p:set>
+                                    <p:animEffect transition="in" filter="fade">
+                                      <p:cBhvr>
+                                        <p:cTn id="12" dur="500"/>
+                                        <p:tgtEl>
+                                          <p:spTgt spid="4"/>
+                                        </p:tgtEl>
+                                      </p:cBhvr>
+                                    </p:animEffect>
+                                  </p:childTnLst>
+                                </p:cTn>
+                              </p:par>
+                            </p:childTnLst>
+                          </p:cTn>
+                        </p:par>
+                      </p:childTnLst>
+                    </p:cTn>
+                  </p:par>
+                  <p:par>
+                    <p:cTn id="13" fill="hold">
+                      <p:stCondLst>
+                        <p:cond delay="indefinite"/>
+                      </p:stCondLst>
+                      <p:childTnLst>
+                        <p:par>
+                          <p:cTn id="14" fill="hold">
+                            <p:stCondLst>
+                              <p:cond delay="0"/>
+                            </p:stCondLst>
+                            <p:childTnLst>
+                              <p:par>
+                                <p:cTn id="15" presetID="10" presetClass="entr" presetSubtype="0" fill="hold" grpId="0" nodeType="clickEffect">
+                                  <p:stCondLst>
+                                    <p:cond delay="0"/>
+                                  </p:stCondLst>
+                                  <p:childTnLst>
+                                    <p:set>
+                                      <p:cBhvr>
+                                        <p:cTn id="16" dur="1" fill="hold">
+                                          <p:stCondLst>
+                                            <p:cond delay="0"/>
+                                          </p:stCondLst>
+                                        </p:cTn>
+                                        <p:tgtEl>
+                                          <p:spTgt spid="5"/>
+                                        </p:tgtEl>
+                                        <p:attrNameLst>
+                                          <p:attrName>style.visibility</p:attrName>
+                                        </p:attrNameLst>
+                                      </p:cBhvr>
+                                      <p:to>
+                                        <p:strVal val="visible"/>
+                                      </p:to>
+                                    </p:set>
+                                    <p:animEffect transition="in" filter="fade">
+                                      <p:cBhvr>
+                                        <p:cTn id="17" dur="500"/>
+                                        <p:tgtEl>
+                                          <p:spTgt spid="5"/>
+                                        </p:tgtEl>
+                                      </p:cBhvr>
+                                    </p:animEffect>
+                                  </p:childTnLst>
+                                </p:cTn>
+                              </p:par>
+                            </p:childTnLst>
+                          </p:cTn>
+                        </p:par>
+                      </p:childTnLst>
+                    </p:cTn>
+                  </p:par>
+                </p:childTnLst>
+              </p:cTn>
+              <p:prevCondLst>
+                <p:cond evt="onPrev" delay="0">
+                  <p:tgtEl>
+                    <p:sldTgt/>
+                  </p:tgtEl>
+                </p:cond>
+              </p:prevCondLst>
+              <p:nextCondLst>
+                <p:cond evt="onNext" delay="0">
+                  <p:tgtEl>
+                    <p:sldTgt/>
+                  </p:tgtEl>
+                </p:cond>
+              </p:nextCondLst>
+            </p:seq>
+          </p:childTnLst>
+        </p:cTn>
+      </p:par>
+    </p:tnLst>
+    <p:bldLst>
+      <p:bldP spid="3" grpId="0" animBg="1"/>
+      <p:bldP spid="4" grpId="0" animBg="1"/>
+      <p:bldP spid="5" grpId="0" animBg="1"/>
+    </p:bldLst>
+  </p:timing>
+</p:sld>
+</file>
+
+<file path=ppt/slides/slide15.xml><?xml version="1.0" encoding="utf-8"?>
 <p:sld xmlns:a="http://schemas.openxmlformats.org/drawingml/2006/main" xmlns:p="http://schemas.openxmlformats.org/presentationml/2006/main" xmlns:r="http://schemas.openxmlformats.org/officeDocument/2006/relationships">
   <p:cSld>
     <p:spTree>
@@ -5258,7 +6369,7 @@
 </p:sld>
 </file>
 
-<file path=ppt/slides/slide14.xml><?xml version="1.0" encoding="utf-8"?>
+<file path=ppt/slides/slide16.xml><?xml version="1.0" encoding="utf-8"?>
 <p:sld xmlns:a="http://schemas.openxmlformats.org/drawingml/2006/main" xmlns:p="http://schemas.openxmlformats.org/presentationml/2006/main" xmlns:r="http://schemas.openxmlformats.org/officeDocument/2006/relationships">
   <p:cSld>
     <p:spTree>
@@ -5326,7 +6437,7 @@
 </p:sld>
 </file>
 
-<file path=ppt/slides/slide15.xml><?xml version="1.0" encoding="utf-8"?>
+<file path=ppt/slides/slide17.xml><?xml version="1.0" encoding="utf-8"?>
 <p:sld xmlns:a="http://schemas.openxmlformats.org/drawingml/2006/main" xmlns:p="http://schemas.openxmlformats.org/presentationml/2006/main" xmlns:r="http://schemas.openxmlformats.org/officeDocument/2006/relationships">
   <p:cSld>
     <p:spTree>
@@ -5988,8 +7099,8 @@
         </p:nvSpPr>
         <p:spPr>
           <a:xfrm>
-            <a:off x="548640" y="4526401"/>
-            <a:ext cx="11094415" cy="365760"/>
+            <a:off x="548640" y="4517257"/>
+            <a:ext cx="11094415" cy="329184"/>
           </a:xfrm>
           <a:prstGeom prst="rect">
             <a:avLst/>
@@ -6030,7 +7141,7 @@
 </p:sld>
 </file>
 
-<file path=ppt/slides/slide16.xml><?xml version="1.0" encoding="utf-8"?>
+<file path=ppt/slides/slide18.xml><?xml version="1.0" encoding="utf-8"?>
 <p:sld xmlns:a="http://schemas.openxmlformats.org/drawingml/2006/main" xmlns:p="http://schemas.openxmlformats.org/presentationml/2006/main" xmlns:r="http://schemas.openxmlformats.org/officeDocument/2006/relationships">
   <p:cSld>
     <p:spTree>
@@ -6522,8 +7633,8 @@
         </p:nvSpPr>
         <p:spPr>
           <a:xfrm>
-            <a:off x="6278727" y="2535936"/>
-            <a:ext cx="5364327" cy="2426208"/>
+            <a:off x="6278727" y="2871216"/>
+            <a:ext cx="5364327" cy="1755648"/>
           </a:xfrm>
           <a:prstGeom prst="rect">
             <a:avLst/>
@@ -7361,7 +8472,7 @@
 </p:sld>
 </file>
 
-<file path=ppt/slides/slide17.xml><?xml version="1.0" encoding="utf-8"?>
+<file path=ppt/slides/slide19.xml><?xml version="1.0" encoding="utf-8"?>
 <p:sld xmlns:a="http://schemas.openxmlformats.org/drawingml/2006/main" xmlns:p="http://schemas.openxmlformats.org/presentationml/2006/main" xmlns:r="http://schemas.openxmlformats.org/officeDocument/2006/relationships">
   <p:cSld>
     <p:spTree>
@@ -7947,7 +9058,102 @@
 </p:sld>
 </file>
 
-<file path=ppt/slides/slide18.xml><?xml version="1.0" encoding="utf-8"?>
+<file path=ppt/slides/slide2.xml><?xml version="1.0" encoding="utf-8"?>
+<p:sld xmlns:a="http://schemas.openxmlformats.org/drawingml/2006/main" xmlns:p="http://schemas.openxmlformats.org/presentationml/2006/main" xmlns:r="http://schemas.openxmlformats.org/officeDocument/2006/relationships">
+  <p:cSld>
+    <p:spTree>
+      <p:nvGrpSpPr>
+        <p:cNvPr id="1" name=""/>
+        <p:cNvGrpSpPr/>
+        <p:nvPr/>
+      </p:nvGrpSpPr>
+      <p:grpSpPr/>
+      <p:sp>
+        <p:nvSpPr>
+          <p:cNvPr id="2" name="Title 1"/>
+          <p:cNvSpPr>
+            <a:spLocks noGrp="1"/>
+          </p:cNvSpPr>
+          <p:nvPr>
+            <p:ph type="title"/>
+          </p:nvPr>
+        </p:nvSpPr>
+        <p:spPr/>
+        <p:txBody>
+          <a:bodyPr/>
+          <a:lstStyle/>
+          <a:p>
+            <a:r>
+              <a:rPr/>
+              <a:t>Outline</a:t>
+            </a:r>
+          </a:p>
+        </p:txBody>
+      </p:sp>
+      <p:sp>
+        <p:nvSpPr>
+          <p:cNvPr id="3" name="Content Placeholder 2"/>
+          <p:cNvSpPr>
+            <a:spLocks noGrp="1"/>
+          </p:cNvSpPr>
+          <p:nvPr>
+            <p:ph idx="1"/>
+          </p:nvPr>
+        </p:nvSpPr>
+        <p:spPr/>
+        <p:txBody>
+          <a:bodyPr/>
+          <a:lstStyle/>
+          <a:p>
+            <a:pPr>
+              <a:buAutoNum type="arabicPeriod"/>
+            </a:pPr>
+            <a:r>
+              <a:rPr/>
+              <a:t>Motivation</a:t>
+            </a:r>
+          </a:p>
+          <a:p>
+            <a:pPr>
+              <a:buAutoNum type="arabicPeriod"/>
+            </a:pPr>
+            <a:r>
+              <a:rPr/>
+              <a:t>Results</a:t>
+            </a:r>
+          </a:p>
+          <a:p>
+            <a:pPr>
+              <a:buAutoNum type="arabicPeriod"/>
+            </a:pPr>
+            <a:r>
+              <a:rPr/>
+              <a:t>Diagrams</a:t>
+            </a:r>
+          </a:p>
+          <a:p>
+            <a:pPr>
+              <a:buAutoNum type="arabicPeriod"/>
+            </a:pPr>
+            <a:r>
+              <a:rPr/>
+              <a:t>Animation</a:t>
+            </a:r>
+          </a:p>
+        </p:txBody>
+      </p:sp>
+    </p:spTree>
+  </p:cSld>
+  <p:clrMapOvr>
+    <a:masterClrMapping/>
+  </p:clrMapOvr>
+  <p:transition spd="med">
+    <p:fade/>
+  </p:transition>
+</p:sld>
+</file>
+
+<file path=ppt/slides/slide20.xml><?xml version="1.0" encoding="utf-8"?>
 <p:sld xmlns:a="http://schemas.openxmlformats.org/drawingml/2006/main" xmlns:p="http://schemas.openxmlformats.org/presentationml/2006/main" xmlns:r="http://schemas.openxmlformats.org/officeDocument/2006/relationships">
   <p:cSld>
     <p:spTree>
@@ -7990,7 +9196,7 @@
 </p:sld>
 </file>
 
-<file path=ppt/slides/slide19.xml><?xml version="1.0" encoding="utf-8"?>
+<file path=ppt/slides/slide21.xml><?xml version="1.0" encoding="utf-8"?>
 <p:sld xmlns:a="http://schemas.openxmlformats.org/drawingml/2006/main" xmlns:p="http://schemas.openxmlformats.org/presentationml/2006/main" xmlns:r="http://schemas.openxmlformats.org/officeDocument/2006/relationships">
   <p:cSld>
     <p:spTree>
@@ -8564,102 +9770,7 @@
 </p:sld>
 </file>
 
-<file path=ppt/slides/slide2.xml><?xml version="1.0" encoding="utf-8"?>
-<p:sld xmlns:a="http://schemas.openxmlformats.org/drawingml/2006/main" xmlns:p="http://schemas.openxmlformats.org/presentationml/2006/main" xmlns:r="http://schemas.openxmlformats.org/officeDocument/2006/relationships">
-  <p:cSld>
-    <p:spTree>
-      <p:nvGrpSpPr>
-        <p:cNvPr id="1" name=""/>
-        <p:cNvGrpSpPr/>
-        <p:nvPr/>
-      </p:nvGrpSpPr>
-      <p:grpSpPr/>
-      <p:sp>
-        <p:nvSpPr>
-          <p:cNvPr id="2" name="Title 1"/>
-          <p:cNvSpPr>
-            <a:spLocks noGrp="1"/>
-          </p:cNvSpPr>
-          <p:nvPr>
-            <p:ph type="title"/>
-          </p:nvPr>
-        </p:nvSpPr>
-        <p:spPr/>
-        <p:txBody>
-          <a:bodyPr/>
-          <a:lstStyle/>
-          <a:p>
-            <a:r>
-              <a:rPr/>
-              <a:t>Outline</a:t>
-            </a:r>
-          </a:p>
-        </p:txBody>
-      </p:sp>
-      <p:sp>
-        <p:nvSpPr>
-          <p:cNvPr id="3" name="Content Placeholder 2"/>
-          <p:cNvSpPr>
-            <a:spLocks noGrp="1"/>
-          </p:cNvSpPr>
-          <p:nvPr>
-            <p:ph idx="1"/>
-          </p:nvPr>
-        </p:nvSpPr>
-        <p:spPr/>
-        <p:txBody>
-          <a:bodyPr/>
-          <a:lstStyle/>
-          <a:p>
-            <a:pPr>
-              <a:buAutoNum type="arabicPeriod"/>
-            </a:pPr>
-            <a:r>
-              <a:rPr/>
-              <a:t>Motivation</a:t>
-            </a:r>
-          </a:p>
-          <a:p>
-            <a:pPr>
-              <a:buAutoNum type="arabicPeriod"/>
-            </a:pPr>
-            <a:r>
-              <a:rPr/>
-              <a:t>Results</a:t>
-            </a:r>
-          </a:p>
-          <a:p>
-            <a:pPr>
-              <a:buAutoNum type="arabicPeriod"/>
-            </a:pPr>
-            <a:r>
-              <a:rPr/>
-              <a:t>Diagrams</a:t>
-            </a:r>
-          </a:p>
-          <a:p>
-            <a:pPr>
-              <a:buAutoNum type="arabicPeriod"/>
-            </a:pPr>
-            <a:r>
-              <a:rPr/>
-              <a:t>Animation</a:t>
-            </a:r>
-          </a:p>
-        </p:txBody>
-      </p:sp>
-    </p:spTree>
-  </p:cSld>
-  <p:clrMapOvr>
-    <a:masterClrMapping/>
-  </p:clrMapOvr>
-  <p:transition spd="med">
-    <p:fade/>
-  </p:transition>
-</p:sld>
-</file>
-
-<file path=ppt/slides/slide20.xml><?xml version="1.0" encoding="utf-8"?>
+<file path=ppt/slides/slide22.xml><?xml version="1.0" encoding="utf-8"?>
 <p:sld xmlns:a="http://schemas.openxmlformats.org/drawingml/2006/main" xmlns:p="http://schemas.openxmlformats.org/presentationml/2006/main" xmlns:r="http://schemas.openxmlformats.org/officeDocument/2006/relationships">
   <p:cSld>
     <p:spTree>
@@ -9011,7 +10122,145 @@
 </p:sld>
 </file>
 
-<file path=ppt/slides/slide21.xml><?xml version="1.0" encoding="utf-8"?>
+<file path=ppt/slides/slide23.xml><?xml version="1.0" encoding="utf-8"?>
+<p:sld xmlns:a="http://schemas.openxmlformats.org/drawingml/2006/main" xmlns:p="http://schemas.openxmlformats.org/presentationml/2006/main" xmlns:r="http://schemas.openxmlformats.org/officeDocument/2006/relationships">
+  <p:cSld>
+    <p:spTree>
+      <p:nvGrpSpPr>
+        <p:cNvPr id="1" name=""/>
+        <p:cNvGrpSpPr/>
+        <p:nvPr/>
+      </p:nvGrpSpPr>
+      <p:grpSpPr/>
+      <p:sp>
+        <p:nvSpPr>
+          <p:cNvPr id="2" name="Title 1"/>
+          <p:cNvSpPr>
+            <a:spLocks noGrp="1"/>
+          </p:cNvSpPr>
+          <p:nvPr>
+            <p:ph type="title"/>
+          </p:nvPr>
+        </p:nvSpPr>
+        <p:spPr/>
+        <p:txBody>
+          <a:bodyPr/>
+          <a:lstStyle/>
+          <a:p>
+            <a:r>
+              <a:rPr/>
+              <a:t>References</a:t>
+            </a:r>
+          </a:p>
+        </p:txBody>
+      </p:sp>
+      <p:sp>
+        <p:nvSpPr>
+          <p:cNvPr id="3" name="References"/>
+          <p:cNvSpPr txBox="1"/>
+          <p:nvPr/>
+        </p:nvSpPr>
+        <p:spPr>
+          <a:xfrm>
+            <a:off x="548640" y="1188720"/>
+            <a:ext cx="11094415" cy="5120640"/>
+          </a:xfrm>
+          <a:prstGeom prst="rect">
+            <a:avLst/>
+          </a:prstGeom>
+          <a:noFill/>
+        </p:spPr>
+        <p:txBody>
+          <a:bodyPr wrap="square" anchor="t" lIns="18288" rIns="18288" tIns="36576" bIns="36576">
+            <a:noAutofit/>
+          </a:bodyPr>
+          <a:lstStyle/>
+          <a:p>
+            <a:pPr marL="430530" indent="-430530">
+              <a:buNone/>
+              <a:tabLst>
+                <a:tab pos="430530" algn="l"/>
+              </a:tabLst>
+            </a:pPr>
+            <a:r>
+              <a:rPr sz="1400"/>
+              <a:t>[1]	</a:t>
+            </a:r>
+            <a:r>
+              <a:rPr sz="1400"/>
+              <a:t>T. Tantau, J. Wright and V. Miletić, "The beamer class," user guide, CTAN.</a:t>
+            </a:r>
+          </a:p>
+          <a:p>
+            <a:pPr marL="430530" indent="-430530">
+              <a:spcBef>
+                <a:spcPts val="700"/>
+              </a:spcBef>
+              <a:buNone/>
+              <a:tabLst>
+                <a:tab pos="430530" algn="l"/>
+              </a:tabLst>
+            </a:pPr>
+            <a:r>
+              <a:rPr sz="1400"/>
+              <a:t>[2]	</a:t>
+            </a:r>
+            <a:r>
+              <a:rPr sz="1400"/>
+              <a:t>J. D. Hunter, "Matplotlib: A 2D graphics environment," </a:t>
+            </a:r>
+            <a:r>
+              <a:rPr sz="1400" i="1"/>
+              <a:t>Computing in Science &amp; Engineering</a:t>
+            </a:r>
+            <a:r>
+              <a:rPr sz="1400"/>
+              <a:t>, vol. 9, no. 3, pp. 90-95, 2007.</a:t>
+            </a:r>
+          </a:p>
+          <a:p>
+            <a:pPr marL="430530" indent="-430530">
+              <a:spcBef>
+                <a:spcPts val="700"/>
+              </a:spcBef>
+              <a:buNone/>
+              <a:tabLst>
+                <a:tab pos="430530" algn="l"/>
+              </a:tabLst>
+            </a:pPr>
+            <a:r>
+              <a:rPr sz="1400"/>
+              <a:t>[3]	</a:t>
+            </a:r>
+            <a:r>
+              <a:rPr sz="1400"/>
+              <a:t>J. MacFarlane, "Pandoc: a universal document converter," </a:t>
+            </a:r>
+            <a:r>
+              <a:rPr sz="1400">
+                <a:hlinkClick r:id="rId2"/>
+              </a:rPr>
+              <a:t>pandoc.org</a:t>
+            </a:r>
+            <a:r>
+              <a:rPr sz="1400"/>
+              <a:t>.</a:t>
+            </a:r>
+          </a:p>
+        </p:txBody>
+      </p:sp>
+    </p:spTree>
+  </p:cSld>
+  <p:clrMapOvr>
+    <a:masterClrMapping/>
+  </p:clrMapOvr>
+  <p:transition spd="med">
+    <p:fade/>
+  </p:transition>
+</p:sld>
+</file>
+
+<file path=ppt/slides/slide24.xml><?xml version="1.0" encoding="utf-8"?>
 <p:sld xmlns:a="http://schemas.openxmlformats.org/drawingml/2006/main" xmlns:p="http://schemas.openxmlformats.org/presentationml/2006/main" xmlns:r="http://schemas.openxmlformats.org/officeDocument/2006/relationships">
   <p:cSld>
     <p:spTree>
@@ -9029,7 +10278,7 @@
         </p:nvSpPr>
         <p:spPr>
           <a:xfrm>
-            <a:off x="548640" y="2600452"/>
+            <a:off x="548640" y="2243328"/>
             <a:ext cx="11094415" cy="881888"/>
           </a:xfrm>
           <a:prstGeom prst="rect">
@@ -9250,6 +10499,7 @@
                 <a:solidFill>
                   <a:schemeClr val="accent1"/>
                 </a:solidFill>
+                <a:latin typeface="+mj-lt"/>
               </a:rPr>
               <a:t>Thank you!</a:t>
             </a:r>
@@ -9264,8 +10514,8 @@
         </p:nvSpPr>
         <p:spPr>
           <a:xfrm>
-            <a:off x="548640" y="3710940"/>
-            <a:ext cx="11094415" cy="546608"/>
+            <a:off x="548640" y="3353816"/>
+            <a:ext cx="11094415" cy="577088"/>
           </a:xfrm>
           <a:prstGeom prst="rect">
             <a:avLst/>
@@ -9481,7 +10731,7 @@
               <a:buNone/>
             </a:pPr>
             <a:r>
-              <a:rPr sz="2200">
+              <a:rPr sz="2400">
                 <a:solidFill>
                   <a:schemeClr val="tx1">
                     <a:lumMod val="55000"/>
@@ -9490,6 +10740,237 @@
                 </a:solidFill>
               </a:rPr>
               <a:t>Questions?</a:t>
+            </a:r>
+          </a:p>
+        </p:txBody>
+      </p:sp>
+      <p:sp>
+        <p:nvSpPr>
+          <p:cNvPr id="4" name="TextBox 3"/>
+          <p:cNvSpPr txBox="1"/>
+          <p:nvPr/>
+        </p:nvSpPr>
+        <p:spPr>
+          <a:xfrm>
+            <a:off x="548640" y="4159504"/>
+            <a:ext cx="11094415" cy="455168"/>
+          </a:xfrm>
+          <a:prstGeom prst="rect">
+            <a:avLst/>
+          </a:prstGeom>
+          <a:noFill/>
+        </p:spPr>
+        <p:txBody>
+          <a:bodyPr wrap="square" anchor="t" lIns="18288" rIns="18288" tIns="36576" bIns="36576">
+            <a:spAutoFit/>
+          </a:bodyPr>
+          <a:lstStyle>
+            <a:lvl1pPr marL="310896" indent="-310896" algn="l" defTabSz="914400" rtl="0" eaLnBrk="1" latinLnBrk="0" hangingPunct="1">
+              <a:lnSpc>
+                <a:spcPct val="100000"/>
+              </a:lnSpc>
+              <a:spcBef>
+                <a:spcPts val="1000"/>
+              </a:spcBef>
+              <a:buClr>
+                <a:schemeClr val="accent1"/>
+              </a:buClr>
+              <a:buSzPct val="70000"/>
+              <a:buFont typeface="Arial" panose="020B0604020202020204"/>
+              <a:buChar char="►"/>
+              <a:defRPr sz="2200" kern="1200">
+                <a:solidFill>
+                  <a:schemeClr val="tx1"/>
+                </a:solidFill>
+                <a:latin typeface="+mn-lt"/>
+                <a:ea typeface="+mn-ea"/>
+                <a:cs typeface="+mn-cs"/>
+              </a:defRPr>
+            </a:lvl1pPr>
+            <a:lvl2pPr marL="676656" indent="-274320" algn="l" defTabSz="914400" rtl="0" eaLnBrk="1" latinLnBrk="0" hangingPunct="1">
+              <a:lnSpc>
+                <a:spcPct val="100000"/>
+              </a:lnSpc>
+              <a:spcBef>
+                <a:spcPts val="400"/>
+              </a:spcBef>
+              <a:buClr>
+                <a:schemeClr val="accent1"/>
+              </a:buClr>
+              <a:buSzPct val="100000"/>
+              <a:buFont typeface="Arial" panose="020B0604020202020204"/>
+              <a:buChar char="•"/>
+              <a:defRPr sz="2000" kern="1200">
+                <a:solidFill>
+                  <a:schemeClr val="tx1"/>
+                </a:solidFill>
+                <a:latin typeface="+mn-lt"/>
+                <a:ea typeface="+mn-ea"/>
+                <a:cs typeface="+mn-cs"/>
+              </a:defRPr>
+            </a:lvl2pPr>
+            <a:lvl3pPr marL="1005840" indent="-256032" algn="l" defTabSz="914400" rtl="0" eaLnBrk="1" latinLnBrk="0" hangingPunct="1">
+              <a:lnSpc>
+                <a:spcPct val="100000"/>
+              </a:lnSpc>
+              <a:spcBef>
+                <a:spcPts val="300"/>
+              </a:spcBef>
+              <a:buClr>
+                <a:schemeClr val="accent1"/>
+              </a:buClr>
+              <a:buSzPct val="100000"/>
+              <a:buFont typeface="Arial" panose="020B0604020202020204"/>
+              <a:buChar char="–"/>
+              <a:defRPr sz="1800" kern="1200">
+                <a:solidFill>
+                  <a:schemeClr val="tx1"/>
+                </a:solidFill>
+                <a:latin typeface="+mn-lt"/>
+                <a:ea typeface="+mn-ea"/>
+                <a:cs typeface="+mn-cs"/>
+              </a:defRPr>
+            </a:lvl3pPr>
+            <a:lvl4pPr marL="1325880" indent="-237744" algn="l" defTabSz="914400" rtl="0" eaLnBrk="1" latinLnBrk="0" hangingPunct="1">
+              <a:lnSpc>
+                <a:spcPct val="100000"/>
+              </a:lnSpc>
+              <a:spcBef>
+                <a:spcPts val="200"/>
+              </a:spcBef>
+              <a:buClr>
+                <a:schemeClr val="accent1"/>
+              </a:buClr>
+              <a:buSzPct val="100000"/>
+              <a:buFont typeface="Arial" panose="020B0604020202020204"/>
+              <a:buChar char="•"/>
+              <a:defRPr sz="1600" kern="1200">
+                <a:solidFill>
+                  <a:schemeClr val="tx1"/>
+                </a:solidFill>
+                <a:latin typeface="+mn-lt"/>
+                <a:ea typeface="+mn-ea"/>
+                <a:cs typeface="+mn-cs"/>
+              </a:defRPr>
+            </a:lvl4pPr>
+            <a:lvl5pPr marL="1645920" indent="-237744" algn="l" defTabSz="914400" rtl="0" eaLnBrk="1" latinLnBrk="0" hangingPunct="1">
+              <a:lnSpc>
+                <a:spcPct val="100000"/>
+              </a:lnSpc>
+              <a:spcBef>
+                <a:spcPts val="200"/>
+              </a:spcBef>
+              <a:buClr>
+                <a:schemeClr val="accent1"/>
+              </a:buClr>
+              <a:buSzPct val="100000"/>
+              <a:buFont typeface="Arial" panose="020B0604020202020204"/>
+              <a:buChar char="–"/>
+              <a:defRPr sz="1600" kern="1200">
+                <a:solidFill>
+                  <a:schemeClr val="tx1"/>
+                </a:solidFill>
+                <a:latin typeface="+mn-lt"/>
+                <a:ea typeface="+mn-ea"/>
+                <a:cs typeface="+mn-cs"/>
+              </a:defRPr>
+            </a:lvl5pPr>
+            <a:lvl6pPr marL="1965960" indent="-237744" algn="l" defTabSz="914400" rtl="0" eaLnBrk="1" latinLnBrk="0" hangingPunct="1">
+              <a:lnSpc>
+                <a:spcPct val="100000"/>
+              </a:lnSpc>
+              <a:spcBef>
+                <a:spcPts val="200"/>
+              </a:spcBef>
+              <a:buClr>
+                <a:schemeClr val="accent1"/>
+              </a:buClr>
+              <a:buSzPct val="100000"/>
+              <a:buFont typeface="Arial" panose="020B0604020202020204"/>
+              <a:buChar char="•"/>
+              <a:defRPr sz="1600" kern="1200">
+                <a:solidFill>
+                  <a:schemeClr val="tx1"/>
+                </a:solidFill>
+                <a:latin typeface="+mn-lt"/>
+                <a:ea typeface="+mn-ea"/>
+                <a:cs typeface="+mn-cs"/>
+              </a:defRPr>
+            </a:lvl6pPr>
+            <a:lvl7pPr marL="2286000" indent="-237744" algn="l" defTabSz="914400" rtl="0" eaLnBrk="1" latinLnBrk="0" hangingPunct="1">
+              <a:lnSpc>
+                <a:spcPct val="100000"/>
+              </a:lnSpc>
+              <a:spcBef>
+                <a:spcPts val="200"/>
+              </a:spcBef>
+              <a:buClr>
+                <a:schemeClr val="accent1"/>
+              </a:buClr>
+              <a:buSzPct val="100000"/>
+              <a:buFont typeface="Arial" panose="020B0604020202020204"/>
+              <a:buChar char="•"/>
+              <a:defRPr sz="1600" kern="1200">
+                <a:solidFill>
+                  <a:schemeClr val="tx1"/>
+                </a:solidFill>
+                <a:latin typeface="+mn-lt"/>
+                <a:ea typeface="+mn-ea"/>
+                <a:cs typeface="+mn-cs"/>
+              </a:defRPr>
+            </a:lvl7pPr>
+            <a:lvl8pPr marL="2606040" indent="-237744" algn="l" defTabSz="914400" rtl="0" eaLnBrk="1" latinLnBrk="0" hangingPunct="1">
+              <a:lnSpc>
+                <a:spcPct val="100000"/>
+              </a:lnSpc>
+              <a:spcBef>
+                <a:spcPts val="200"/>
+              </a:spcBef>
+              <a:buClr>
+                <a:schemeClr val="accent1"/>
+              </a:buClr>
+              <a:buSzPct val="100000"/>
+              <a:buFont typeface="Arial" panose="020B0604020202020204"/>
+              <a:buChar char="•"/>
+              <a:defRPr sz="1600" kern="1200">
+                <a:solidFill>
+                  <a:schemeClr val="tx1"/>
+                </a:solidFill>
+                <a:latin typeface="+mn-lt"/>
+                <a:ea typeface="+mn-ea"/>
+                <a:cs typeface="+mn-cs"/>
+              </a:defRPr>
+            </a:lvl8pPr>
+            <a:lvl9pPr marL="2926080" indent="-237744" algn="l" defTabSz="914400" rtl="0" eaLnBrk="1" latinLnBrk="0" hangingPunct="1">
+              <a:lnSpc>
+                <a:spcPct val="100000"/>
+              </a:lnSpc>
+              <a:spcBef>
+                <a:spcPts val="200"/>
+              </a:spcBef>
+              <a:buClr>
+                <a:schemeClr val="accent1"/>
+              </a:buClr>
+              <a:buSzPct val="100000"/>
+              <a:buFont typeface="Arial" panose="020B0604020202020204"/>
+              <a:buChar char="•"/>
+              <a:defRPr sz="1600" kern="1200">
+                <a:solidFill>
+                  <a:schemeClr val="tx1"/>
+                </a:solidFill>
+                <a:latin typeface="+mn-lt"/>
+                <a:ea typeface="+mn-ea"/>
+                <a:cs typeface="+mn-cs"/>
+              </a:defRPr>
+            </a:lvl9pPr>
+          </a:lstStyle>
+          <a:p>
+            <a:pPr marL="0" indent="0" algn="ctr">
+              <a:buNone/>
+            </a:pPr>
+            <a:r>
+              <a:rPr sz="1600"/>
+              <a:t>Made with ppt-templated</a:t>
             </a:r>
           </a:p>
         </p:txBody>
@@ -10708,10 +12189,10 @@
         </p:nvGrpSpPr>
         <p:grpSpPr>
           <a:xfrm>
-            <a:off x="8188757" y="2994387"/>
-            <a:ext cx="3454298" cy="1509306"/>
-            <a:chOff x="8188757" y="2994387"/>
-            <a:chExt cx="3454298" cy="1509306"/>
+            <a:off x="8188757" y="2743435"/>
+            <a:ext cx="3454298" cy="2011210"/>
+            <a:chOff x="8188757" y="2743435"/>
+            <a:chExt cx="3454298" cy="2011210"/>
           </a:xfrm>
         </p:grpSpPr>
         <p:sp>
@@ -10722,12 +12203,12 @@
           </p:nvSpPr>
           <p:spPr>
             <a:xfrm>
-              <a:off x="8188757" y="2994387"/>
-              <a:ext cx="3454298" cy="1509306"/>
+              <a:off x="8188757" y="2743435"/>
+              <a:ext cx="3454298" cy="2011210"/>
             </a:xfrm>
             <a:prstGeom prst="roundRect">
               <a:avLst>
-                <a:gd name="adj" fmla="val 5452"/>
+                <a:gd name="adj" fmla="val 4091"/>
               </a:avLst>
             </a:prstGeom>
             <a:solidFill>
@@ -10968,7 +12449,7 @@
           </p:nvSpPr>
           <p:spPr>
             <a:xfrm>
-              <a:off x="8188757" y="2994387"/>
+              <a:off x="8188757" y="2743435"/>
               <a:ext cx="3454298" cy="483146"/>
             </a:xfrm>
             <a:prstGeom prst="round2SameRect">
@@ -12930,8 +14411,8 @@
         </p:nvSpPr>
         <p:spPr>
           <a:xfrm>
-            <a:off x="7137020" y="2076939"/>
-            <a:ext cx="4506035" cy="2009648"/>
+            <a:off x="7137020" y="2412219"/>
+            <a:ext cx="4506035" cy="1339088"/>
           </a:xfrm>
           <a:prstGeom prst="rect">
             <a:avLst/>
@@ -13173,9 +14654,9 @@
         </p:nvGrpSpPr>
         <p:grpSpPr>
           <a:xfrm>
-            <a:off x="7137020" y="4315187"/>
+            <a:off x="7137020" y="3979907"/>
             <a:ext cx="4506035" cy="1105954"/>
-            <a:chOff x="7137020" y="4315187"/>
+            <a:chOff x="7137020" y="3979907"/>
             <a:chExt cx="4506035" cy="1105954"/>
           </a:xfrm>
         </p:grpSpPr>
@@ -13187,7 +14668,7 @@
           </p:nvSpPr>
           <p:spPr>
             <a:xfrm>
-              <a:off x="7137020" y="4315187"/>
+              <a:off x="7137020" y="3979907"/>
               <a:ext cx="4506035" cy="1105954"/>
             </a:xfrm>
             <a:prstGeom prst="roundRect">
@@ -13432,7 +14913,7 @@
           </p:nvSpPr>
           <p:spPr>
             <a:xfrm>
-              <a:off x="7137020" y="4315187"/>
+              <a:off x="7137020" y="3979907"/>
               <a:ext cx="4506035" cy="483146"/>
             </a:xfrm>
             <a:prstGeom prst="round2SameRect">
